--- a/05-midterm-report/figures/fig-1-system-architecture.pptx
+++ b/05-midterm-report/figures/fig-1-system-architecture.pptx
@@ -895,7 +895,7 @@
             <a:r>
               <a:rPr lang="en-US" sz="1800" b="1" dirty="0">
                 <a:solidFill>
-                  <a:srgbClr val="1E293B"/>
+                  <a:srgbClr val="1A1A1A"/>
                 </a:solidFill>
                 <a:latin typeface="맑은 고딕" pitchFamily="34" charset="0"/>
                 <a:ea typeface="맑은 고딕" pitchFamily="34" charset="-122"/>
@@ -924,13 +924,13 @@
             </a:avLst>
           </a:prstGeom>
           <a:solidFill>
-            <a:srgbClr val="2563EB">
+            <a:srgbClr val="1B3A5C">
               <a:alpha val="10000"/>
             </a:srgbClr>
           </a:solidFill>
           <a:ln w="25400">
             <a:solidFill>
-              <a:srgbClr val="2563EB"/>
+              <a:srgbClr val="1B3A5C"/>
             </a:solidFill>
             <a:prstDash val="solid"/>
           </a:ln>
@@ -963,7 +963,7 @@
             <a:r>
               <a:rPr lang="en-US" sz="1200" b="1" dirty="0">
                 <a:solidFill>
-                  <a:srgbClr val="2563EB"/>
+                  <a:srgbClr val="1B3A5C"/>
                 </a:solidFill>
                 <a:latin typeface="맑은 고딕" pitchFamily="34" charset="0"/>
                 <a:ea typeface="맑은 고딕" pitchFamily="34" charset="-122"/>
@@ -996,7 +996,7 @@
           </a:solidFill>
           <a:ln w="15240">
             <a:solidFill>
-              <a:srgbClr val="2563EB"/>
+              <a:srgbClr val="1B3A5C"/>
             </a:solidFill>
             <a:prstDash val="solid"/>
           </a:ln>
@@ -1029,7 +1029,7 @@
             <a:r>
               <a:rPr lang="en-US" sz="900" b="1" dirty="0">
                 <a:solidFill>
-                  <a:srgbClr val="2563EB"/>
+                  <a:srgbClr val="1B3A5C"/>
                 </a:solidFill>
                 <a:latin typeface="맑은 고딕" pitchFamily="34" charset="0"/>
                 <a:ea typeface="맑은 고딕" pitchFamily="34" charset="-122"/>
@@ -1062,7 +1062,7 @@
           </a:solidFill>
           <a:ln w="15240">
             <a:solidFill>
-              <a:srgbClr val="2563EB"/>
+              <a:srgbClr val="1B3A5C"/>
             </a:solidFill>
             <a:prstDash val="solid"/>
           </a:ln>
@@ -1095,7 +1095,7 @@
             <a:r>
               <a:rPr lang="en-US" sz="900" b="1" dirty="0">
                 <a:solidFill>
-                  <a:srgbClr val="2563EB"/>
+                  <a:srgbClr val="1B3A5C"/>
                 </a:solidFill>
                 <a:latin typeface="맑은 고딕" pitchFamily="34" charset="0"/>
                 <a:ea typeface="맑은 고딕" pitchFamily="34" charset="-122"/>
@@ -1124,13 +1124,13 @@
             </a:avLst>
           </a:prstGeom>
           <a:solidFill>
-            <a:srgbClr val="059669">
+            <a:srgbClr val="2D6A4F">
               <a:alpha val="10000"/>
             </a:srgbClr>
           </a:solidFill>
           <a:ln w="25400">
             <a:solidFill>
-              <a:srgbClr val="059669"/>
+              <a:srgbClr val="2D6A4F"/>
             </a:solidFill>
             <a:prstDash val="solid"/>
           </a:ln>
@@ -1163,7 +1163,7 @@
             <a:r>
               <a:rPr lang="en-US" sz="1200" b="1" dirty="0">
                 <a:solidFill>
-                  <a:srgbClr val="059669"/>
+                  <a:srgbClr val="2D6A4F"/>
                 </a:solidFill>
                 <a:latin typeface="맑은 고딕" pitchFamily="34" charset="0"/>
                 <a:ea typeface="맑은 고딕" pitchFamily="34" charset="-122"/>
@@ -1196,7 +1196,7 @@
           </a:solidFill>
           <a:ln w="15240">
             <a:solidFill>
-              <a:srgbClr val="059669"/>
+              <a:srgbClr val="2D6A4F"/>
             </a:solidFill>
             <a:prstDash val="solid"/>
           </a:ln>
@@ -1229,7 +1229,7 @@
             <a:r>
               <a:rPr lang="en-US" sz="900" b="1" dirty="0">
                 <a:solidFill>
-                  <a:srgbClr val="059669"/>
+                  <a:srgbClr val="2D6A4F"/>
                 </a:solidFill>
                 <a:latin typeface="맑은 고딕" pitchFamily="34" charset="0"/>
                 <a:ea typeface="맑은 고딕" pitchFamily="34" charset="-122"/>
@@ -1262,7 +1262,7 @@
           </a:solidFill>
           <a:ln w="15240">
             <a:solidFill>
-              <a:srgbClr val="059669"/>
+              <a:srgbClr val="2D6A4F"/>
             </a:solidFill>
             <a:prstDash val="solid"/>
           </a:ln>
@@ -1295,7 +1295,7 @@
             <a:r>
               <a:rPr lang="en-US" sz="900" b="1" dirty="0">
                 <a:solidFill>
-                  <a:srgbClr val="059669"/>
+                  <a:srgbClr val="2D6A4F"/>
                 </a:solidFill>
                 <a:latin typeface="맑은 고딕" pitchFamily="34" charset="0"/>
                 <a:ea typeface="맑은 고딕" pitchFamily="34" charset="-122"/>
@@ -1328,7 +1328,7 @@
           </a:solidFill>
           <a:ln w="15240">
             <a:solidFill>
-              <a:srgbClr val="059669"/>
+              <a:srgbClr val="2D6A4F"/>
             </a:solidFill>
             <a:prstDash val="solid"/>
           </a:ln>
@@ -1361,7 +1361,7 @@
             <a:r>
               <a:rPr lang="en-US" sz="900" b="1" dirty="0">
                 <a:solidFill>
-                  <a:srgbClr val="059669"/>
+                  <a:srgbClr val="2D6A4F"/>
                 </a:solidFill>
                 <a:latin typeface="맑은 고딕" pitchFamily="34" charset="0"/>
                 <a:ea typeface="맑은 고딕" pitchFamily="34" charset="-122"/>
@@ -1390,13 +1390,13 @@
             </a:avLst>
           </a:prstGeom>
           <a:solidFill>
-            <a:srgbClr val="D97706">
+            <a:srgbClr val="7C4D1A">
               <a:alpha val="10000"/>
             </a:srgbClr>
           </a:solidFill>
           <a:ln w="25400">
             <a:solidFill>
-              <a:srgbClr val="D97706"/>
+              <a:srgbClr val="7C4D1A"/>
             </a:solidFill>
             <a:prstDash val="solid"/>
           </a:ln>
@@ -1429,7 +1429,7 @@
             <a:r>
               <a:rPr lang="en-US" sz="1200" b="1" dirty="0">
                 <a:solidFill>
-                  <a:srgbClr val="D97706"/>
+                  <a:srgbClr val="7C4D1A"/>
                 </a:solidFill>
                 <a:latin typeface="맑은 고딕" pitchFamily="34" charset="0"/>
                 <a:ea typeface="맑은 고딕" pitchFamily="34" charset="-122"/>
@@ -1462,7 +1462,7 @@
           </a:solidFill>
           <a:ln w="15240">
             <a:solidFill>
-              <a:srgbClr val="D97706"/>
+              <a:srgbClr val="7C4D1A"/>
             </a:solidFill>
             <a:prstDash val="solid"/>
           </a:ln>
@@ -1495,7 +1495,7 @@
             <a:r>
               <a:rPr lang="en-US" sz="900" b="1" dirty="0">
                 <a:solidFill>
-                  <a:srgbClr val="D97706"/>
+                  <a:srgbClr val="7C4D1A"/>
                 </a:solidFill>
                 <a:latin typeface="맑은 고딕" pitchFamily="34" charset="0"/>
                 <a:ea typeface="맑은 고딕" pitchFamily="34" charset="-122"/>
@@ -1528,7 +1528,7 @@
           </a:solidFill>
           <a:ln w="15240">
             <a:solidFill>
-              <a:srgbClr val="D97706"/>
+              <a:srgbClr val="7C4D1A"/>
             </a:solidFill>
             <a:prstDash val="solid"/>
           </a:ln>
@@ -1561,7 +1561,7 @@
             <a:r>
               <a:rPr lang="en-US" sz="900" b="1" dirty="0">
                 <a:solidFill>
-                  <a:srgbClr val="D97706"/>
+                  <a:srgbClr val="7C4D1A"/>
                 </a:solidFill>
                 <a:latin typeface="맑은 고딕" pitchFamily="34" charset="0"/>
                 <a:ea typeface="맑은 고딕" pitchFamily="34" charset="-122"/>
@@ -1594,7 +1594,7 @@
           </a:solidFill>
           <a:ln w="15240">
             <a:solidFill>
-              <a:srgbClr val="D97706"/>
+              <a:srgbClr val="7C4D1A"/>
             </a:solidFill>
             <a:prstDash val="solid"/>
           </a:ln>
@@ -1627,7 +1627,7 @@
             <a:r>
               <a:rPr lang="en-US" sz="900" b="1" dirty="0">
                 <a:solidFill>
-                  <a:srgbClr val="D97706"/>
+                  <a:srgbClr val="7C4D1A"/>
                 </a:solidFill>
                 <a:latin typeface="맑은 고딕" pitchFamily="34" charset="0"/>
                 <a:ea typeface="맑은 고딕" pitchFamily="34" charset="-122"/>
@@ -1660,7 +1660,7 @@
           </a:solidFill>
           <a:ln w="15240">
             <a:solidFill>
-              <a:srgbClr val="D97706"/>
+              <a:srgbClr val="7C4D1A"/>
             </a:solidFill>
             <a:prstDash val="solid"/>
           </a:ln>
@@ -1693,7 +1693,7 @@
             <a:r>
               <a:rPr lang="en-US" sz="900" b="1" dirty="0">
                 <a:solidFill>
-                  <a:srgbClr val="D97706"/>
+                  <a:srgbClr val="7C4D1A"/>
                 </a:solidFill>
                 <a:latin typeface="맑은 고딕" pitchFamily="34" charset="0"/>
                 <a:ea typeface="맑은 고딕" pitchFamily="34" charset="-122"/>
@@ -1722,13 +1722,13 @@
             </a:avLst>
           </a:prstGeom>
           <a:solidFill>
-            <a:srgbClr val="64748B">
+            <a:srgbClr val="4A5568">
               <a:alpha val="10000"/>
             </a:srgbClr>
           </a:solidFill>
           <a:ln w="25400">
             <a:solidFill>
-              <a:srgbClr val="64748B"/>
+              <a:srgbClr val="4A5568"/>
             </a:solidFill>
             <a:prstDash val="solid"/>
           </a:ln>
@@ -1761,7 +1761,7 @@
             <a:r>
               <a:rPr lang="en-US" sz="1200" b="1" dirty="0">
                 <a:solidFill>
-                  <a:srgbClr val="64748B"/>
+                  <a:srgbClr val="4A5568"/>
                 </a:solidFill>
                 <a:latin typeface="맑은 고딕" pitchFamily="34" charset="0"/>
                 <a:ea typeface="맑은 고딕" pitchFamily="34" charset="-122"/>
@@ -1794,7 +1794,7 @@
           </a:solidFill>
           <a:ln w="15240">
             <a:solidFill>
-              <a:srgbClr val="64748B"/>
+              <a:srgbClr val="4A5568"/>
             </a:solidFill>
             <a:prstDash val="solid"/>
           </a:ln>
@@ -1827,7 +1827,7 @@
             <a:r>
               <a:rPr lang="en-US" sz="900" b="1" dirty="0">
                 <a:solidFill>
-                  <a:srgbClr val="64748B"/>
+                  <a:srgbClr val="4A5568"/>
                 </a:solidFill>
                 <a:latin typeface="맑은 고딕" pitchFamily="34" charset="0"/>
                 <a:ea typeface="맑은 고딕" pitchFamily="34" charset="-122"/>
@@ -1860,7 +1860,7 @@
           </a:solidFill>
           <a:ln w="15240">
             <a:solidFill>
-              <a:srgbClr val="64748B"/>
+              <a:srgbClr val="4A5568"/>
             </a:solidFill>
             <a:prstDash val="solid"/>
           </a:ln>
@@ -1893,7 +1893,7 @@
             <a:r>
               <a:rPr lang="en-US" sz="900" b="1" dirty="0">
                 <a:solidFill>
-                  <a:srgbClr val="64748B"/>
+                  <a:srgbClr val="4A5568"/>
                 </a:solidFill>
                 <a:latin typeface="맑은 고딕" pitchFamily="34" charset="0"/>
                 <a:ea typeface="맑은 고딕" pitchFamily="34" charset="-122"/>
@@ -1926,7 +1926,7 @@
           </a:solidFill>
           <a:ln w="15240">
             <a:solidFill>
-              <a:srgbClr val="64748B"/>
+              <a:srgbClr val="4A5568"/>
             </a:solidFill>
             <a:prstDash val="solid"/>
           </a:ln>
@@ -1959,7 +1959,7 @@
             <a:r>
               <a:rPr lang="en-US" sz="900" b="1" dirty="0">
                 <a:solidFill>
-                  <a:srgbClr val="64748B"/>
+                  <a:srgbClr val="4A5568"/>
                 </a:solidFill>
                 <a:latin typeface="맑은 고딕" pitchFamily="34" charset="0"/>
                 <a:ea typeface="맑은 고딕" pitchFamily="34" charset="-122"/>
@@ -1986,7 +1986,7 @@
             <a:avLst/>
           </a:prstGeom>
           <a:solidFill>
-            <a:srgbClr val="2563EB"/>
+            <a:srgbClr val="1B3A5C"/>
           </a:solidFill>
           <a:ln/>
         </p:spPr>
@@ -2018,7 +2018,7 @@
             <a:r>
               <a:rPr lang="en-US" sz="700" dirty="0">
                 <a:solidFill>
-                  <a:srgbClr val="2563EB"/>
+                  <a:srgbClr val="1B3A5C"/>
                 </a:solidFill>
                 <a:latin typeface="맑은 고딕" pitchFamily="34" charset="0"/>
                 <a:ea typeface="맑은 고딕" pitchFamily="34" charset="-122"/>
@@ -2045,7 +2045,7 @@
             <a:avLst/>
           </a:prstGeom>
           <a:solidFill>
-            <a:srgbClr val="059669"/>
+            <a:srgbClr val="2D6A4F"/>
           </a:solidFill>
           <a:ln/>
         </p:spPr>
@@ -2077,7 +2077,7 @@
             <a:r>
               <a:rPr lang="en-US" sz="700" dirty="0">
                 <a:solidFill>
-                  <a:srgbClr val="059669"/>
+                  <a:srgbClr val="2D6A4F"/>
                 </a:solidFill>
                 <a:latin typeface="맑은 고딕" pitchFamily="34" charset="0"/>
                 <a:ea typeface="맑은 고딕" pitchFamily="34" charset="-122"/>
@@ -2104,7 +2104,7 @@
             <a:avLst/>
           </a:prstGeom>
           <a:solidFill>
-            <a:srgbClr val="059669"/>
+            <a:srgbClr val="2D6A4F"/>
           </a:solidFill>
           <a:ln/>
         </p:spPr>
@@ -2136,7 +2136,7 @@
             <a:r>
               <a:rPr lang="en-US" sz="700" dirty="0">
                 <a:solidFill>
-                  <a:srgbClr val="059669"/>
+                  <a:srgbClr val="2D6A4F"/>
                 </a:solidFill>
                 <a:latin typeface="맑은 고딕" pitchFamily="34" charset="0"/>
                 <a:ea typeface="맑은 고딕" pitchFamily="34" charset="-122"/>
@@ -2163,7 +2163,7 @@
             <a:avLst/>
           </a:prstGeom>
           <a:solidFill>
-            <a:srgbClr val="D97706"/>
+            <a:srgbClr val="7C4D1A"/>
           </a:solidFill>
           <a:ln/>
         </p:spPr>
@@ -2195,7 +2195,7 @@
             <a:r>
               <a:rPr lang="en-US" sz="700" dirty="0">
                 <a:solidFill>
-                  <a:srgbClr val="D97706"/>
+                  <a:srgbClr val="7C4D1A"/>
                 </a:solidFill>
                 <a:latin typeface="맑은 고딕" pitchFamily="34" charset="0"/>
                 <a:ea typeface="맑은 고딕" pitchFamily="34" charset="-122"/>
@@ -2222,7 +2222,7 @@
             <a:avLst/>
           </a:prstGeom>
           <a:solidFill>
-            <a:srgbClr val="D97706"/>
+            <a:srgbClr val="7C4D1A"/>
           </a:solidFill>
           <a:ln/>
         </p:spPr>
@@ -2254,7 +2254,7 @@
             <a:r>
               <a:rPr lang="en-US" sz="700" dirty="0">
                 <a:solidFill>
-                  <a:srgbClr val="D97706"/>
+                  <a:srgbClr val="7C4D1A"/>
                 </a:solidFill>
                 <a:latin typeface="맑은 고딕" pitchFamily="34" charset="0"/>
                 <a:ea typeface="맑은 고딕" pitchFamily="34" charset="-122"/>
@@ -2281,7 +2281,7 @@
             <a:avLst/>
           </a:prstGeom>
           <a:solidFill>
-            <a:srgbClr val="64748B"/>
+            <a:srgbClr val="4A5568"/>
           </a:solidFill>
           <a:ln/>
         </p:spPr>
@@ -2313,7 +2313,7 @@
             <a:r>
               <a:rPr lang="en-US" sz="700" dirty="0">
                 <a:solidFill>
-                  <a:srgbClr val="64748B"/>
+                  <a:srgbClr val="4A5568"/>
                 </a:solidFill>
                 <a:latin typeface="맑은 고딕" pitchFamily="34" charset="0"/>
                 <a:ea typeface="맑은 고딕" pitchFamily="34" charset="-122"/>
